--- a/reports/portfolio/2026-07-04.pptx
+++ b/reports/portfolio/2026-07-04.pptx
@@ -3215,7 +3215,7 @@
                   <a:srgbClr val="555555"/>
                 </a:solidFill>
               </a:rPr>
-              <a:t>생성일: 2026-07-04 00:31 KST</a:t>
+              <a:t>생성일: 2026-07-04 02:06 KST</a:t>
             </a:r>
           </a:p>
         </p:txBody>

--- a/reports/portfolio/2026-07-04.pptx
+++ b/reports/portfolio/2026-07-04.pptx
@@ -3215,7 +3215,7 @@
                   <a:srgbClr val="555555"/>
                 </a:solidFill>
               </a:rPr>
-              <a:t>생성일: 2026-07-04 02:06 KST</a:t>
+              <a:t>생성일: 2026-07-04 03:42 KST</a:t>
             </a:r>
           </a:p>
         </p:txBody>

--- a/reports/portfolio/2026-07-04.pptx
+++ b/reports/portfolio/2026-07-04.pptx
@@ -3215,7 +3215,7 @@
                   <a:srgbClr val="555555"/>
                 </a:solidFill>
               </a:rPr>
-              <a:t>생성일: 2026-07-04 03:42 KST</a:t>
+              <a:t>생성일: 2026-07-04 05:06 KST</a:t>
             </a:r>
           </a:p>
         </p:txBody>

--- a/reports/portfolio/2026-07-04.pptx
+++ b/reports/portfolio/2026-07-04.pptx
@@ -3215,7 +3215,7 @@
                   <a:srgbClr val="555555"/>
                 </a:solidFill>
               </a:rPr>
-              <a:t>생성일: 2026-07-04 05:06 KST</a:t>
+              <a:t>생성일: 2026-07-04 06:35 KST</a:t>
             </a:r>
           </a:p>
         </p:txBody>

--- a/reports/portfolio/2026-07-04.pptx
+++ b/reports/portfolio/2026-07-04.pptx
@@ -3215,7 +3215,7 @@
                   <a:srgbClr val="555555"/>
                 </a:solidFill>
               </a:rPr>
-              <a:t>생성일: 2026-07-04 06:35 KST</a:t>
+              <a:t>생성일: 2026-07-04 07:46 KST</a:t>
             </a:r>
           </a:p>
         </p:txBody>

--- a/reports/portfolio/2026-07-04.pptx
+++ b/reports/portfolio/2026-07-04.pptx
@@ -3215,7 +3215,7 @@
                   <a:srgbClr val="555555"/>
                 </a:solidFill>
               </a:rPr>
-              <a:t>생성일: 2026-07-04 07:46 KST</a:t>
+              <a:t>생성일: 2026-07-04 08:50 KST</a:t>
             </a:r>
           </a:p>
         </p:txBody>

--- a/reports/portfolio/2026-07-04.pptx
+++ b/reports/portfolio/2026-07-04.pptx
@@ -3215,7 +3215,7 @@
                   <a:srgbClr val="555555"/>
                 </a:solidFill>
               </a:rPr>
-              <a:t>생성일: 2026-07-04 08:50 KST</a:t>
+              <a:t>생성일: 2026-07-04 10:45 KST</a:t>
             </a:r>
           </a:p>
         </p:txBody>

--- a/reports/portfolio/2026-07-04.pptx
+++ b/reports/portfolio/2026-07-04.pptx
@@ -3215,7 +3215,7 @@
                   <a:srgbClr val="555555"/>
                 </a:solidFill>
               </a:rPr>
-              <a:t>생성일: 2026-07-04 10:45 KST</a:t>
+              <a:t>생성일: 2026-07-04 14:31 KST</a:t>
             </a:r>
           </a:p>
         </p:txBody>

--- a/reports/portfolio/2026-07-04.pptx
+++ b/reports/portfolio/2026-07-04.pptx
@@ -3215,7 +3215,7 @@
                   <a:srgbClr val="555555"/>
                 </a:solidFill>
               </a:rPr>
-              <a:t>생성일: 2026-07-04 14:31 KST</a:t>
+              <a:t>생성일: 2026-07-04 17:15 KST</a:t>
             </a:r>
           </a:p>
         </p:txBody>

--- a/reports/portfolio/2026-07-04.pptx
+++ b/reports/portfolio/2026-07-04.pptx
@@ -3215,7 +3215,7 @@
                   <a:srgbClr val="555555"/>
                 </a:solidFill>
               </a:rPr>
-              <a:t>생성일: 2026-07-04 17:15 KST</a:t>
+              <a:t>생성일: 2026-07-04 19:28 KST</a:t>
             </a:r>
           </a:p>
         </p:txBody>

--- a/reports/portfolio/2026-07-04.pptx
+++ b/reports/portfolio/2026-07-04.pptx
@@ -3215,7 +3215,7 @@
                   <a:srgbClr val="555555"/>
                 </a:solidFill>
               </a:rPr>
-              <a:t>생성일: 2026-07-04 19:28 KST</a:t>
+              <a:t>생성일: 2026-07-04 20:58 KST</a:t>
             </a:r>
           </a:p>
         </p:txBody>

--- a/reports/portfolio/2026-07-04.pptx
+++ b/reports/portfolio/2026-07-04.pptx
@@ -3215,7 +3215,7 @@
                   <a:srgbClr val="555555"/>
                 </a:solidFill>
               </a:rPr>
-              <a:t>생성일: 2026-07-04 20:58 KST</a:t>
+              <a:t>생성일: 2026-07-04 23:04 KST</a:t>
             </a:r>
           </a:p>
         </p:txBody>
